--- a/report/데이터지도_분석보고서_V12.pptx
+++ b/report/데이터지도_분석보고서_V12.pptx
@@ -227,7 +227,7 @@
           <a:p>
             <a:fld id="{5B1CCFCC-030A-4CE8-A15F-A37FC6BFC187}" type="datetimeFigureOut">
               <a:rPr lang="ko-KR" altLang="en-US" smtClean="0"/>
-              <a:t>2026-06-07</a:t>
+              <a:t>2026-06-08</a:t>
             </a:fld>
             <a:endParaRPr lang="ko-KR" altLang="en-US"/>
           </a:p>
@@ -757,7 +757,7 @@
           <a:p>
             <a:fld id="{5BCAD085-E8A6-8845-BD4E-CB4CCA059FC4}" type="datetimeFigureOut">
               <a:rPr lang="en-US" smtClean="0"/>
-              <a:t>6/7/2026</a:t>
+              <a:t>6/8/2026</a:t>
             </a:fld>
             <a:endParaRPr lang="en-US"/>
           </a:p>
@@ -925,7 +925,7 @@
           <a:p>
             <a:fld id="{5BCAD085-E8A6-8845-BD4E-CB4CCA059FC4}" type="datetimeFigureOut">
               <a:rPr lang="en-US" smtClean="0"/>
-              <a:t>6/7/2026</a:t>
+              <a:t>6/8/2026</a:t>
             </a:fld>
             <a:endParaRPr lang="en-US"/>
           </a:p>
@@ -1103,7 +1103,7 @@
           <a:p>
             <a:fld id="{5BCAD085-E8A6-8845-BD4E-CB4CCA059FC4}" type="datetimeFigureOut">
               <a:rPr lang="en-US" smtClean="0"/>
-              <a:t>6/7/2026</a:t>
+              <a:t>6/8/2026</a:t>
             </a:fld>
             <a:endParaRPr lang="en-US"/>
           </a:p>
@@ -1271,7 +1271,7 @@
           <a:p>
             <a:fld id="{5BCAD085-E8A6-8845-BD4E-CB4CCA059FC4}" type="datetimeFigureOut">
               <a:rPr lang="en-US" smtClean="0"/>
-              <a:t>6/7/2026</a:t>
+              <a:t>6/8/2026</a:t>
             </a:fld>
             <a:endParaRPr lang="en-US"/>
           </a:p>
@@ -1516,7 +1516,7 @@
           <a:p>
             <a:fld id="{5BCAD085-E8A6-8845-BD4E-CB4CCA059FC4}" type="datetimeFigureOut">
               <a:rPr lang="en-US" smtClean="0"/>
-              <a:t>6/7/2026</a:t>
+              <a:t>6/8/2026</a:t>
             </a:fld>
             <a:endParaRPr lang="en-US"/>
           </a:p>
@@ -1801,7 +1801,7 @@
           <a:p>
             <a:fld id="{5BCAD085-E8A6-8845-BD4E-CB4CCA059FC4}" type="datetimeFigureOut">
               <a:rPr lang="en-US" smtClean="0"/>
-              <a:t>6/7/2026</a:t>
+              <a:t>6/8/2026</a:t>
             </a:fld>
             <a:endParaRPr lang="en-US"/>
           </a:p>
@@ -2220,7 +2220,7 @@
           <a:p>
             <a:fld id="{5BCAD085-E8A6-8845-BD4E-CB4CCA059FC4}" type="datetimeFigureOut">
               <a:rPr lang="en-US" smtClean="0"/>
-              <a:t>6/7/2026</a:t>
+              <a:t>6/8/2026</a:t>
             </a:fld>
             <a:endParaRPr lang="en-US"/>
           </a:p>
@@ -2337,7 +2337,7 @@
           <a:p>
             <a:fld id="{5BCAD085-E8A6-8845-BD4E-CB4CCA059FC4}" type="datetimeFigureOut">
               <a:rPr lang="en-US" smtClean="0"/>
-              <a:t>6/7/2026</a:t>
+              <a:t>6/8/2026</a:t>
             </a:fld>
             <a:endParaRPr lang="en-US"/>
           </a:p>
@@ -2432,7 +2432,7 @@
           <a:p>
             <a:fld id="{5BCAD085-E8A6-8845-BD4E-CB4CCA059FC4}" type="datetimeFigureOut">
               <a:rPr lang="en-US" smtClean="0"/>
-              <a:t>6/7/2026</a:t>
+              <a:t>6/8/2026</a:t>
             </a:fld>
             <a:endParaRPr lang="en-US"/>
           </a:p>
@@ -2707,7 +2707,7 @@
           <a:p>
             <a:fld id="{5BCAD085-E8A6-8845-BD4E-CB4CCA059FC4}" type="datetimeFigureOut">
               <a:rPr lang="en-US" smtClean="0"/>
-              <a:t>6/7/2026</a:t>
+              <a:t>6/8/2026</a:t>
             </a:fld>
             <a:endParaRPr lang="en-US"/>
           </a:p>
@@ -2959,7 +2959,7 @@
           <a:p>
             <a:fld id="{5BCAD085-E8A6-8845-BD4E-CB4CCA059FC4}" type="datetimeFigureOut">
               <a:rPr lang="en-US" smtClean="0"/>
-              <a:t>6/7/2026</a:t>
+              <a:t>6/8/2026</a:t>
             </a:fld>
             <a:endParaRPr lang="en-US"/>
           </a:p>
@@ -3170,7 +3170,7 @@
           <a:p>
             <a:fld id="{5BCAD085-E8A6-8845-BD4E-CB4CCA059FC4}" type="datetimeFigureOut">
               <a:rPr lang="en-US" smtClean="0"/>
-              <a:t>6/7/2026</a:t>
+              <a:t>6/8/2026</a:t>
             </a:fld>
             <a:endParaRPr lang="en-US"/>
           </a:p>
@@ -32590,7 +32590,7 @@
             </a:r>
           </a:p>
           <a:p>
-            <a:pPr lvl="1" algn="l">
+            <a:pPr marL="742950" lvl="1" indent="-285750" algn="l">
               <a:lnSpc>
                 <a:spcPct val="104000"/>
               </a:lnSpc>
@@ -32600,8 +32600,20 @@
               <a:spcAft>
                 <a:spcPts val="900"/>
               </a:spcAft>
+              <a:buFont typeface="Wingdings" panose="05000000000000000000" pitchFamily="2" charset="2"/>
+              <a:buChar char="ü"/>
             </a:pPr>
             <a:r>
+              <a:rPr sz="1300" b="0" i="0" dirty="0" err="1">
+                <a:solidFill>
+                  <a:srgbClr val="505050"/>
+                </a:solidFill>
+                <a:latin typeface="맑은 고딕"/>
+                <a:ea typeface="맑은 고딕"/>
+              </a:rPr>
+              <a:t>제각각인</a:t>
+            </a:r>
+            <a:r>
               <a:rPr sz="1300" b="0" i="0" dirty="0">
                 <a:solidFill>
                   <a:srgbClr val="505050"/>
@@ -32609,7 +32621,7 @@
                 <a:latin typeface="맑은 고딕"/>
                 <a:ea typeface="맑은 고딕"/>
               </a:rPr>
-              <a:t>– 제각각인 999개 </a:t>
+              <a:t> 999개 </a:t>
             </a:r>
             <a:r>
               <a:rPr lang="en-US" sz="1300" dirty="0" err="1">
@@ -32860,6 +32872,68 @@
             </a:endParaRPr>
           </a:p>
           <a:p>
+            <a:pPr marL="742950" lvl="1" indent="-285750" algn="l">
+              <a:lnSpc>
+                <a:spcPct val="104000"/>
+              </a:lnSpc>
+              <a:spcBef>
+                <a:spcPts val="0"/>
+              </a:spcBef>
+              <a:spcAft>
+                <a:spcPts val="900"/>
+              </a:spcAft>
+              <a:buFont typeface="Wingdings" panose="05000000000000000000" pitchFamily="2" charset="2"/>
+              <a:buChar char="ü"/>
+            </a:pPr>
+            <a:r>
+              <a:rPr sz="1300" b="0" i="0" dirty="0" err="1">
+                <a:solidFill>
+                  <a:srgbClr val="505050"/>
+                </a:solidFill>
+                <a:latin typeface="맑은 고딕"/>
+                <a:ea typeface="맑은 고딕"/>
+              </a:rPr>
+              <a:t>우선순위로</a:t>
+            </a:r>
+            <a:r>
+              <a:rPr sz="1300" b="0" i="0" dirty="0">
+                <a:solidFill>
+                  <a:srgbClr val="505050"/>
+                </a:solidFill>
+                <a:latin typeface="맑은 고딕"/>
+                <a:ea typeface="맑은 고딕"/>
+              </a:rPr>
+              <a:t> 1건씩 분류(</a:t>
+            </a:r>
+            <a:r>
+              <a:rPr sz="1300" b="0" i="0" dirty="0" err="1">
+                <a:solidFill>
+                  <a:srgbClr val="505050"/>
+                </a:solidFill>
+                <a:latin typeface="맑은 고딕"/>
+                <a:ea typeface="맑은 고딕"/>
+              </a:rPr>
+              <a:t>교육→중앙→공공</a:t>
+            </a:r>
+            <a:r>
+              <a:rPr sz="1300" b="0" i="0" dirty="0">
+                <a:solidFill>
+                  <a:srgbClr val="505050"/>
+                </a:solidFill>
+                <a:latin typeface="맑은 고딕"/>
+                <a:ea typeface="맑은 고딕"/>
+              </a:rPr>
+              <a:t>→</a:t>
+            </a:r>
+            <a:endParaRPr lang="en-US" sz="1300" b="0" i="0" dirty="0">
+              <a:solidFill>
+                <a:srgbClr val="505050"/>
+              </a:solidFill>
+              <a:latin typeface="맑은 고딕"/>
+              <a:ea typeface="맑은 고딕"/>
+            </a:endParaRPr>
+          </a:p>
+          <a:p>
             <a:pPr lvl="1" algn="l">
               <a:lnSpc>
                 <a:spcPct val="104000"/>
@@ -32872,6 +32946,26 @@
               </a:spcAft>
             </a:pPr>
             <a:r>
+              <a:rPr lang="en-US" sz="1300" dirty="0">
+                <a:solidFill>
+                  <a:srgbClr val="505050"/>
+                </a:solidFill>
+                <a:latin typeface="맑은 고딕"/>
+                <a:ea typeface="맑은 고딕"/>
+              </a:rPr>
+              <a:t>     </a:t>
+            </a:r>
+            <a:r>
+              <a:rPr sz="1300" b="0" i="0" dirty="0" err="1">
+                <a:solidFill>
+                  <a:srgbClr val="505050"/>
+                </a:solidFill>
+                <a:latin typeface="맑은 고딕"/>
+                <a:ea typeface="맑은 고딕"/>
+              </a:rPr>
+              <a:t>광역→기초→미상→기타</a:t>
+            </a:r>
+            <a:r>
               <a:rPr sz="1300" b="0" i="0" dirty="0">
                 <a:solidFill>
                   <a:srgbClr val="505050"/>
@@ -32879,7 +32973,47 @@
                 <a:latin typeface="맑은 고딕"/>
                 <a:ea typeface="맑은 고딕"/>
               </a:rPr>
-              <a:t>– 우선순위로 1건씩 분류(교육→중앙→공공→광역→기초→미상→기타), ‘소스’·빈값은 </a:t>
+              <a:t>), </a:t>
+            </a:r>
+            <a:endParaRPr lang="en-US" sz="1300" b="0" i="0" dirty="0">
+              <a:solidFill>
+                <a:srgbClr val="505050"/>
+              </a:solidFill>
+              <a:latin typeface="맑은 고딕"/>
+              <a:ea typeface="맑은 고딕"/>
+            </a:endParaRPr>
+          </a:p>
+          <a:p>
+            <a:pPr lvl="1" algn="l">
+              <a:lnSpc>
+                <a:spcPct val="104000"/>
+              </a:lnSpc>
+              <a:spcBef>
+                <a:spcPts val="0"/>
+              </a:spcBef>
+              <a:spcAft>
+                <a:spcPts val="900"/>
+              </a:spcAft>
+            </a:pPr>
+            <a:r>
+              <a:rPr lang="en-US" sz="1300" dirty="0">
+                <a:solidFill>
+                  <a:srgbClr val="505050"/>
+                </a:solidFill>
+                <a:latin typeface="맑은 고딕"/>
+                <a:ea typeface="맑은 고딕"/>
+              </a:rPr>
+              <a:t>     </a:t>
+            </a:r>
+            <a:r>
+              <a:rPr sz="1300" b="0" i="0" dirty="0">
+                <a:solidFill>
+                  <a:srgbClr val="505050"/>
+                </a:solidFill>
+                <a:latin typeface="맑은 고딕"/>
+                <a:ea typeface="맑은 고딕"/>
+              </a:rPr>
+              <a:t>‘소스’·빈값은 </a:t>
             </a:r>
             <a:r>
               <a:rPr sz="1300" b="0" i="0" dirty="0" err="1">
@@ -38113,7 +38247,7 @@
         <p:spPr>
           <a:xfrm>
             <a:off x="694944" y="2267712"/>
-            <a:ext cx="2334691" cy="1097352"/>
+            <a:ext cx="2334691" cy="1961819"/>
           </a:xfrm>
           <a:prstGeom prst="rect">
             <a:avLst/>
@@ -38157,6 +38291,26 @@
               </a:rPr>
               <a:t>출처 누락 공통성</a:t>
             </a:r>
+            <a:endParaRPr lang="en-US" altLang="ko-KR" sz="1400" b="1" i="0" dirty="0">
+              <a:solidFill>
+                <a:srgbClr val="282D37"/>
+              </a:solidFill>
+              <a:latin typeface="맑은 고딕"/>
+              <a:ea typeface="맑은 고딕"/>
+            </a:endParaRPr>
+          </a:p>
+          <a:p>
+            <a:pPr algn="l">
+              <a:lnSpc>
+                <a:spcPct val="104000"/>
+              </a:lnSpc>
+              <a:spcBef>
+                <a:spcPts val="0"/>
+              </a:spcBef>
+              <a:spcAft>
+                <a:spcPts val="500"/>
+              </a:spcAft>
+            </a:pPr>
             <a:endParaRPr sz="1400" b="1" i="0" dirty="0">
               <a:solidFill>
                 <a:srgbClr val="282D37"/>
@@ -38207,6 +38361,13 @@
               </a:rPr>
               <a:t>’ 100건</a:t>
             </a:r>
+            <a:endParaRPr lang="en-US" sz="1400" b="0" i="0" dirty="0">
+              <a:solidFill>
+                <a:srgbClr val="282D37"/>
+              </a:solidFill>
+              <a:latin typeface="맑은 고딕"/>
+              <a:ea typeface="맑은 고딕"/>
+            </a:endParaRPr>
           </a:p>
           <a:p>
             <a:pPr algn="l">
@@ -38220,6 +38381,26 @@
                 <a:spcPts val="500"/>
               </a:spcAft>
             </a:pPr>
+            <a:endParaRPr sz="1400" b="0" i="0" dirty="0">
+              <a:solidFill>
+                <a:srgbClr val="282D37"/>
+              </a:solidFill>
+              <a:latin typeface="맑은 고딕"/>
+              <a:ea typeface="맑은 고딕"/>
+            </a:endParaRPr>
+          </a:p>
+          <a:p>
+            <a:pPr algn="l">
+              <a:lnSpc>
+                <a:spcPct val="104000"/>
+              </a:lnSpc>
+              <a:spcBef>
+                <a:spcPts val="0"/>
+              </a:spcBef>
+              <a:spcAft>
+                <a:spcPts val="500"/>
+              </a:spcAft>
+            </a:pPr>
             <a:r>
               <a:rPr sz="1400" b="0" i="0" dirty="0">
                 <a:solidFill>
@@ -38250,6 +38431,33 @@
               </a:rPr>
               <a:t>')</a:t>
             </a:r>
+            <a:endParaRPr lang="en-US" sz="1400" b="0" i="0" dirty="0">
+              <a:solidFill>
+                <a:srgbClr val="282D37"/>
+              </a:solidFill>
+              <a:latin typeface="맑은 고딕"/>
+              <a:ea typeface="맑은 고딕"/>
+            </a:endParaRPr>
+          </a:p>
+          <a:p>
+            <a:pPr algn="l">
+              <a:lnSpc>
+                <a:spcPct val="104000"/>
+              </a:lnSpc>
+              <a:spcBef>
+                <a:spcPts val="0"/>
+              </a:spcBef>
+              <a:spcAft>
+                <a:spcPts val="500"/>
+              </a:spcAft>
+            </a:pPr>
+            <a:endParaRPr sz="1400" b="0" i="0" dirty="0">
+              <a:solidFill>
+                <a:srgbClr val="282D37"/>
+              </a:solidFill>
+              <a:latin typeface="맑은 고딕"/>
+              <a:ea typeface="맑은 고딕"/>
+            </a:endParaRPr>
           </a:p>
           <a:p>
             <a:pPr algn="l">
@@ -38454,7 +38662,7 @@
         <p:spPr>
           <a:xfrm>
             <a:off x="3523411" y="2267712"/>
-            <a:ext cx="2334691" cy="1097352"/>
+            <a:ext cx="2334691" cy="1385507"/>
           </a:xfrm>
           <a:prstGeom prst="rect">
             <a:avLst/>
@@ -38479,15 +38687,42 @@
               </a:spcAft>
             </a:pPr>
             <a:r>
-              <a:rPr sz="1400" b="0" i="0">
-                <a:solidFill>
-                  <a:srgbClr val="282D37"/>
-                </a:solidFill>
-                <a:latin typeface="맑은 고딕"/>
-                <a:ea typeface="맑은 고딕"/>
-              </a:rPr>
-              <a:t>• 상수컬럼 1,372개(13.9%)</a:t>
-            </a:r>
+              <a:rPr sz="1400" b="0" i="0" dirty="0">
+                <a:solidFill>
+                  <a:srgbClr val="282D37"/>
+                </a:solidFill>
+                <a:latin typeface="맑은 고딕"/>
+                <a:ea typeface="맑은 고딕"/>
+              </a:rPr>
+              <a:t>• </a:t>
+            </a:r>
+            <a:r>
+              <a:rPr sz="1400" b="0" i="0" dirty="0" err="1">
+                <a:solidFill>
+                  <a:srgbClr val="282D37"/>
+                </a:solidFill>
+                <a:latin typeface="맑은 고딕"/>
+                <a:ea typeface="맑은 고딕"/>
+              </a:rPr>
+              <a:t>상수컬럼</a:t>
+            </a:r>
+            <a:r>
+              <a:rPr sz="1400" b="0" i="0" dirty="0">
+                <a:solidFill>
+                  <a:srgbClr val="282D37"/>
+                </a:solidFill>
+                <a:latin typeface="맑은 고딕"/>
+                <a:ea typeface="맑은 고딕"/>
+              </a:rPr>
+              <a:t> 1,372개(13.9%)</a:t>
+            </a:r>
+            <a:endParaRPr lang="en-US" sz="1400" b="0" i="0" dirty="0">
+              <a:solidFill>
+                <a:srgbClr val="282D37"/>
+              </a:solidFill>
+              <a:latin typeface="맑은 고딕"/>
+              <a:ea typeface="맑은 고딕"/>
+            </a:endParaRPr>
           </a:p>
           <a:p>
             <a:pPr algn="l">
@@ -38501,16 +38736,13 @@
                 <a:spcPts val="500"/>
               </a:spcAft>
             </a:pPr>
-            <a:r>
-              <a:rPr sz="1400" b="0" i="0">
-                <a:solidFill>
-                  <a:srgbClr val="282D37"/>
-                </a:solidFill>
-                <a:latin typeface="맑은 고딕"/>
-                <a:ea typeface="맑은 고딕"/>
-              </a:rPr>
-              <a:t>• 컬럼명 표준 부재</a:t>
-            </a:r>
+            <a:endParaRPr sz="1400" b="0" i="0" dirty="0">
+              <a:solidFill>
+                <a:srgbClr val="282D37"/>
+              </a:solidFill>
+              <a:latin typeface="맑은 고딕"/>
+              <a:ea typeface="맑은 고딕"/>
+            </a:endParaRPr>
           </a:p>
           <a:p>
             <a:pPr algn="l">
@@ -38525,15 +38757,172 @@
               </a:spcAft>
             </a:pPr>
             <a:r>
-              <a:rPr sz="1400" b="0" i="0">
-                <a:solidFill>
-                  <a:srgbClr val="282D37"/>
-                </a:solidFill>
-                <a:latin typeface="맑은 고딕"/>
-                <a:ea typeface="맑은 고딕"/>
-              </a:rPr>
-              <a:t>• same_ratio 네이밍 오류</a:t>
-            </a:r>
+              <a:rPr sz="1400" b="0" i="0" dirty="0">
+                <a:solidFill>
+                  <a:srgbClr val="282D37"/>
+                </a:solidFill>
+                <a:latin typeface="맑은 고딕"/>
+                <a:ea typeface="맑은 고딕"/>
+              </a:rPr>
+              <a:t>• </a:t>
+            </a:r>
+            <a:r>
+              <a:rPr sz="1400" b="0" i="0" dirty="0" err="1">
+                <a:solidFill>
+                  <a:srgbClr val="282D37"/>
+                </a:solidFill>
+                <a:latin typeface="맑은 고딕"/>
+                <a:ea typeface="맑은 고딕"/>
+              </a:rPr>
+              <a:t>컬럼명</a:t>
+            </a:r>
+            <a:r>
+              <a:rPr sz="1400" b="0" i="0" dirty="0">
+                <a:solidFill>
+                  <a:srgbClr val="282D37"/>
+                </a:solidFill>
+                <a:latin typeface="맑은 고딕"/>
+                <a:ea typeface="맑은 고딕"/>
+              </a:rPr>
+              <a:t> </a:t>
+            </a:r>
+            <a:r>
+              <a:rPr sz="1400" b="0" i="0" dirty="0" err="1">
+                <a:solidFill>
+                  <a:srgbClr val="282D37"/>
+                </a:solidFill>
+                <a:latin typeface="맑은 고딕"/>
+                <a:ea typeface="맑은 고딕"/>
+              </a:rPr>
+              <a:t>표준</a:t>
+            </a:r>
+            <a:r>
+              <a:rPr sz="1400" b="0" i="0" dirty="0">
+                <a:solidFill>
+                  <a:srgbClr val="282D37"/>
+                </a:solidFill>
+                <a:latin typeface="맑은 고딕"/>
+                <a:ea typeface="맑은 고딕"/>
+              </a:rPr>
+              <a:t> </a:t>
+            </a:r>
+            <a:r>
+              <a:rPr sz="1400" b="0" i="0" dirty="0" err="1">
+                <a:solidFill>
+                  <a:srgbClr val="282D37"/>
+                </a:solidFill>
+                <a:latin typeface="맑은 고딕"/>
+                <a:ea typeface="맑은 고딕"/>
+              </a:rPr>
+              <a:t>부재</a:t>
+            </a:r>
+            <a:endParaRPr lang="en-US" sz="1400" b="0" i="0" dirty="0">
+              <a:solidFill>
+                <a:srgbClr val="282D37"/>
+              </a:solidFill>
+              <a:latin typeface="맑은 고딕"/>
+              <a:ea typeface="맑은 고딕"/>
+            </a:endParaRPr>
+          </a:p>
+          <a:p>
+            <a:pPr algn="l">
+              <a:lnSpc>
+                <a:spcPct val="104000"/>
+              </a:lnSpc>
+              <a:spcBef>
+                <a:spcPts val="0"/>
+              </a:spcBef>
+              <a:spcAft>
+                <a:spcPts val="500"/>
+              </a:spcAft>
+            </a:pPr>
+            <a:endParaRPr sz="1400" b="0" i="0" dirty="0">
+              <a:solidFill>
+                <a:srgbClr val="282D37"/>
+              </a:solidFill>
+              <a:latin typeface="맑은 고딕"/>
+              <a:ea typeface="맑은 고딕"/>
+            </a:endParaRPr>
+          </a:p>
+          <a:p>
+            <a:pPr algn="l">
+              <a:lnSpc>
+                <a:spcPct val="104000"/>
+              </a:lnSpc>
+              <a:spcBef>
+                <a:spcPts val="0"/>
+              </a:spcBef>
+              <a:spcAft>
+                <a:spcPts val="500"/>
+              </a:spcAft>
+            </a:pPr>
+            <a:r>
+              <a:rPr sz="1400" b="0" i="0" dirty="0">
+                <a:solidFill>
+                  <a:srgbClr val="282D37"/>
+                </a:solidFill>
+                <a:latin typeface="맑은 고딕"/>
+                <a:ea typeface="맑은 고딕"/>
+              </a:rPr>
+              <a:t>• </a:t>
+            </a:r>
+            <a:r>
+              <a:rPr sz="1400" b="0" i="0" dirty="0" err="1">
+                <a:solidFill>
+                  <a:srgbClr val="282D37"/>
+                </a:solidFill>
+                <a:latin typeface="맑은 고딕"/>
+                <a:ea typeface="맑은 고딕"/>
+              </a:rPr>
+              <a:t>same_ratio</a:t>
+            </a:r>
+            <a:r>
+              <a:rPr sz="1400" b="0" i="0" dirty="0">
+                <a:solidFill>
+                  <a:srgbClr val="282D37"/>
+                </a:solidFill>
+                <a:latin typeface="맑은 고딕"/>
+                <a:ea typeface="맑은 고딕"/>
+              </a:rPr>
+              <a:t> </a:t>
+            </a:r>
+            <a:r>
+              <a:rPr sz="1400" b="0" i="0" dirty="0" err="1">
+                <a:solidFill>
+                  <a:srgbClr val="282D37"/>
+                </a:solidFill>
+                <a:latin typeface="맑은 고딕"/>
+                <a:ea typeface="맑은 고딕"/>
+              </a:rPr>
+              <a:t>네이밍</a:t>
+            </a:r>
+            <a:r>
+              <a:rPr sz="1400" b="0" i="0" dirty="0">
+                <a:solidFill>
+                  <a:srgbClr val="282D37"/>
+                </a:solidFill>
+                <a:latin typeface="맑은 고딕"/>
+                <a:ea typeface="맑은 고딕"/>
+              </a:rPr>
+              <a:t> </a:t>
+            </a:r>
+            <a:r>
+              <a:rPr sz="1400" b="0" i="0" dirty="0" err="1">
+                <a:solidFill>
+                  <a:srgbClr val="282D37"/>
+                </a:solidFill>
+                <a:latin typeface="맑은 고딕"/>
+                <a:ea typeface="맑은 고딕"/>
+              </a:rPr>
+              <a:t>오류</a:t>
+            </a:r>
+            <a:endParaRPr sz="1400" b="0" i="0" dirty="0">
+              <a:solidFill>
+                <a:srgbClr val="282D37"/>
+              </a:solidFill>
+              <a:latin typeface="맑은 고딕"/>
+              <a:ea typeface="맑은 고딕"/>
+            </a:endParaRPr>
           </a:p>
         </p:txBody>
       </p:sp>
@@ -38688,7 +39077,7 @@
         <p:spPr>
           <a:xfrm>
             <a:off x="6351879" y="2267712"/>
-            <a:ext cx="2334691" cy="1321387"/>
+            <a:ext cx="2334691" cy="2185855"/>
           </a:xfrm>
           <a:prstGeom prst="rect">
             <a:avLst/>
@@ -38792,6 +39181,26 @@
               </a:rPr>
               <a:t>원형</a:t>
             </a:r>
+            <a:endParaRPr lang="en-US" sz="1400" b="0" i="0" dirty="0">
+              <a:solidFill>
+                <a:srgbClr val="282D37"/>
+              </a:solidFill>
+              <a:latin typeface="맑은 고딕"/>
+              <a:ea typeface="맑은 고딕"/>
+            </a:endParaRPr>
+          </a:p>
+          <a:p>
+            <a:pPr algn="l">
+              <a:lnSpc>
+                <a:spcPct val="104000"/>
+              </a:lnSpc>
+              <a:spcBef>
+                <a:spcPts val="0"/>
+              </a:spcBef>
+              <a:spcAft>
+                <a:spcPts val="500"/>
+              </a:spcAft>
+            </a:pPr>
             <a:endParaRPr sz="1400" b="0" i="0" dirty="0">
               <a:solidFill>
                 <a:srgbClr val="282D37"/>
@@ -38842,6 +39251,13 @@
               </a:rPr>
               <a:t> lift 22.7</a:t>
             </a:r>
+            <a:endParaRPr lang="en-US" sz="1400" b="0" i="0" dirty="0">
+              <a:solidFill>
+                <a:srgbClr val="282D37"/>
+              </a:solidFill>
+              <a:latin typeface="맑은 고딕"/>
+              <a:ea typeface="맑은 고딕"/>
+            </a:endParaRPr>
           </a:p>
           <a:p>
             <a:pPr algn="l">
@@ -38855,6 +39271,26 @@
                 <a:spcPts val="500"/>
               </a:spcAft>
             </a:pPr>
+            <a:endParaRPr sz="1400" b="0" i="0" dirty="0">
+              <a:solidFill>
+                <a:srgbClr val="282D37"/>
+              </a:solidFill>
+              <a:latin typeface="맑은 고딕"/>
+              <a:ea typeface="맑은 고딕"/>
+            </a:endParaRPr>
+          </a:p>
+          <a:p>
+            <a:pPr algn="l">
+              <a:lnSpc>
+                <a:spcPct val="104000"/>
+              </a:lnSpc>
+              <a:spcBef>
+                <a:spcPts val="0"/>
+              </a:spcBef>
+              <a:spcAft>
+                <a:spcPts val="500"/>
+              </a:spcAft>
+            </a:pPr>
             <a:r>
               <a:rPr sz="1400" b="0" i="0" dirty="0">
                 <a:solidFill>
@@ -38885,6 +39321,33 @@
               </a:rPr>
               <a:t> 124.9</a:t>
             </a:r>
+            <a:endParaRPr lang="en-US" sz="1400" b="0" i="0" dirty="0">
+              <a:solidFill>
+                <a:srgbClr val="282D37"/>
+              </a:solidFill>
+              <a:latin typeface="맑은 고딕"/>
+              <a:ea typeface="맑은 고딕"/>
+            </a:endParaRPr>
+          </a:p>
+          <a:p>
+            <a:pPr algn="l">
+              <a:lnSpc>
+                <a:spcPct val="104000"/>
+              </a:lnSpc>
+              <a:spcBef>
+                <a:spcPts val="0"/>
+              </a:spcBef>
+              <a:spcAft>
+                <a:spcPts val="500"/>
+              </a:spcAft>
+            </a:pPr>
+            <a:endParaRPr sz="1400" b="0" i="0" dirty="0">
+              <a:solidFill>
+                <a:srgbClr val="282D37"/>
+              </a:solidFill>
+              <a:latin typeface="맑은 고딕"/>
+              <a:ea typeface="맑은 고딕"/>
+            </a:endParaRPr>
           </a:p>
           <a:p>
             <a:pPr algn="l">
@@ -39082,7 +39545,7 @@
         <p:spPr>
           <a:xfrm>
             <a:off x="9180347" y="2267712"/>
-            <a:ext cx="2334691" cy="1097352"/>
+            <a:ext cx="2334691" cy="1961819"/>
           </a:xfrm>
           <a:prstGeom prst="rect">
             <a:avLst/>
@@ -39107,15 +39570,62 @@
               </a:spcAft>
             </a:pPr>
             <a:r>
-              <a:rPr sz="1400" b="0" i="0">
-                <a:solidFill>
-                  <a:srgbClr val="282D37"/>
-                </a:solidFill>
-                <a:latin typeface="맑은 고딕"/>
-                <a:ea typeface="맑은 고딕"/>
-              </a:rPr>
-              <a:t>• 의료기관 PII 묶음 lift 46</a:t>
-            </a:r>
+              <a:rPr sz="1400" b="0" i="0" dirty="0">
+                <a:solidFill>
+                  <a:srgbClr val="282D37"/>
+                </a:solidFill>
+                <a:latin typeface="맑은 고딕"/>
+                <a:ea typeface="맑은 고딕"/>
+              </a:rPr>
+              <a:t>• </a:t>
+            </a:r>
+            <a:r>
+              <a:rPr sz="1400" b="0" i="0" dirty="0" err="1">
+                <a:solidFill>
+                  <a:srgbClr val="282D37"/>
+                </a:solidFill>
+                <a:latin typeface="맑은 고딕"/>
+                <a:ea typeface="맑은 고딕"/>
+              </a:rPr>
+              <a:t>의료기관</a:t>
+            </a:r>
+            <a:r>
+              <a:rPr sz="1400" b="0" i="0" dirty="0">
+                <a:solidFill>
+                  <a:srgbClr val="282D37"/>
+                </a:solidFill>
+                <a:latin typeface="맑은 고딕"/>
+                <a:ea typeface="맑은 고딕"/>
+              </a:rPr>
+              <a:t> PII </a:t>
+            </a:r>
+            <a:r>
+              <a:rPr sz="1400" b="0" i="0" dirty="0" err="1">
+                <a:solidFill>
+                  <a:srgbClr val="282D37"/>
+                </a:solidFill>
+                <a:latin typeface="맑은 고딕"/>
+                <a:ea typeface="맑은 고딕"/>
+              </a:rPr>
+              <a:t>묶음</a:t>
+            </a:r>
+            <a:r>
+              <a:rPr sz="1400" b="0" i="0" dirty="0">
+                <a:solidFill>
+                  <a:srgbClr val="282D37"/>
+                </a:solidFill>
+                <a:latin typeface="맑은 고딕"/>
+                <a:ea typeface="맑은 고딕"/>
+              </a:rPr>
+              <a:t> lift 46</a:t>
+            </a:r>
+            <a:endParaRPr lang="en-US" sz="1400" b="0" i="0" dirty="0">
+              <a:solidFill>
+                <a:srgbClr val="282D37"/>
+              </a:solidFill>
+              <a:latin typeface="맑은 고딕"/>
+              <a:ea typeface="맑은 고딕"/>
+            </a:endParaRPr>
           </a:p>
           <a:p>
             <a:pPr algn="l">
@@ -39129,16 +39639,13 @@
                 <a:spcPts val="500"/>
               </a:spcAft>
             </a:pPr>
-            <a:r>
-              <a:rPr sz="1400" b="0" i="0">
-                <a:solidFill>
-                  <a:srgbClr val="282D37"/>
-                </a:solidFill>
-                <a:latin typeface="맑은 고딕"/>
-                <a:ea typeface="맑은 고딕"/>
-              </a:rPr>
-              <a:t>• 교차도메인 재식별 위험</a:t>
-            </a:r>
+            <a:endParaRPr sz="1400" b="0" i="0" dirty="0">
+              <a:solidFill>
+                <a:srgbClr val="282D37"/>
+              </a:solidFill>
+              <a:latin typeface="맑은 고딕"/>
+              <a:ea typeface="맑은 고딕"/>
+            </a:endParaRPr>
           </a:p>
           <a:p>
             <a:pPr algn="l">
@@ -39153,15 +39660,72 @@
               </a:spcAft>
             </a:pPr>
             <a:r>
-              <a:rPr sz="1400" b="0" i="0">
-                <a:solidFill>
-                  <a:srgbClr val="282D37"/>
-                </a:solidFill>
-                <a:latin typeface="맑은 고딕"/>
-                <a:ea typeface="맑은 고딕"/>
-              </a:rPr>
-              <a:t>• 규칙#4: 1.00→0.44 약화</a:t>
-            </a:r>
+              <a:rPr sz="1400" b="0" i="0" dirty="0">
+                <a:solidFill>
+                  <a:srgbClr val="282D37"/>
+                </a:solidFill>
+                <a:latin typeface="맑은 고딕"/>
+                <a:ea typeface="맑은 고딕"/>
+              </a:rPr>
+              <a:t>• </a:t>
+            </a:r>
+            <a:r>
+              <a:rPr sz="1400" b="0" i="0" dirty="0" err="1">
+                <a:solidFill>
+                  <a:srgbClr val="282D37"/>
+                </a:solidFill>
+                <a:latin typeface="맑은 고딕"/>
+                <a:ea typeface="맑은 고딕"/>
+              </a:rPr>
+              <a:t>교차도메인</a:t>
+            </a:r>
+            <a:r>
+              <a:rPr sz="1400" b="0" i="0" dirty="0">
+                <a:solidFill>
+                  <a:srgbClr val="282D37"/>
+                </a:solidFill>
+                <a:latin typeface="맑은 고딕"/>
+                <a:ea typeface="맑은 고딕"/>
+              </a:rPr>
+              <a:t> </a:t>
+            </a:r>
+            <a:r>
+              <a:rPr sz="1400" b="0" i="0" dirty="0" err="1">
+                <a:solidFill>
+                  <a:srgbClr val="282D37"/>
+                </a:solidFill>
+                <a:latin typeface="맑은 고딕"/>
+                <a:ea typeface="맑은 고딕"/>
+              </a:rPr>
+              <a:t>재식별</a:t>
+            </a:r>
+            <a:r>
+              <a:rPr sz="1400" b="0" i="0" dirty="0">
+                <a:solidFill>
+                  <a:srgbClr val="282D37"/>
+                </a:solidFill>
+                <a:latin typeface="맑은 고딕"/>
+                <a:ea typeface="맑은 고딕"/>
+              </a:rPr>
+              <a:t> </a:t>
+            </a:r>
+            <a:r>
+              <a:rPr sz="1400" b="0" i="0" dirty="0" err="1">
+                <a:solidFill>
+                  <a:srgbClr val="282D37"/>
+                </a:solidFill>
+                <a:latin typeface="맑은 고딕"/>
+                <a:ea typeface="맑은 고딕"/>
+              </a:rPr>
+              <a:t>위험</a:t>
+            </a:r>
+            <a:endParaRPr lang="en-US" sz="1400" b="0" i="0" dirty="0">
+              <a:solidFill>
+                <a:srgbClr val="282D37"/>
+              </a:solidFill>
+              <a:latin typeface="맑은 고딕"/>
+              <a:ea typeface="맑은 고딕"/>
+            </a:endParaRPr>
           </a:p>
           <a:p>
             <a:pPr algn="l">
@@ -39175,16 +39739,153 @@
                 <a:spcPts val="500"/>
               </a:spcAft>
             </a:pPr>
-            <a:r>
-              <a:rPr sz="1400" b="0" i="0">
-                <a:solidFill>
-                  <a:srgbClr val="282D37"/>
-                </a:solidFill>
-                <a:latin typeface="맑은 고딕"/>
-                <a:ea typeface="맑은 고딕"/>
-              </a:rPr>
-              <a:t>• 카탈로그 오분류 후보</a:t>
-            </a:r>
+            <a:endParaRPr sz="1400" b="0" i="0" dirty="0">
+              <a:solidFill>
+                <a:srgbClr val="282D37"/>
+              </a:solidFill>
+              <a:latin typeface="맑은 고딕"/>
+              <a:ea typeface="맑은 고딕"/>
+            </a:endParaRPr>
+          </a:p>
+          <a:p>
+            <a:pPr algn="l">
+              <a:lnSpc>
+                <a:spcPct val="104000"/>
+              </a:lnSpc>
+              <a:spcBef>
+                <a:spcPts val="0"/>
+              </a:spcBef>
+              <a:spcAft>
+                <a:spcPts val="500"/>
+              </a:spcAft>
+            </a:pPr>
+            <a:r>
+              <a:rPr sz="1400" b="0" i="0" dirty="0">
+                <a:solidFill>
+                  <a:srgbClr val="282D37"/>
+                </a:solidFill>
+                <a:latin typeface="맑은 고딕"/>
+                <a:ea typeface="맑은 고딕"/>
+              </a:rPr>
+              <a:t>• 규칙#4: 1.00→0.44 </a:t>
+            </a:r>
+            <a:r>
+              <a:rPr sz="1400" b="0" i="0" dirty="0" err="1">
+                <a:solidFill>
+                  <a:srgbClr val="282D37"/>
+                </a:solidFill>
+                <a:latin typeface="맑은 고딕"/>
+                <a:ea typeface="맑은 고딕"/>
+              </a:rPr>
+              <a:t>약화</a:t>
+            </a:r>
+            <a:endParaRPr lang="en-US" sz="1400" b="0" i="0" dirty="0">
+              <a:solidFill>
+                <a:srgbClr val="282D37"/>
+              </a:solidFill>
+              <a:latin typeface="맑은 고딕"/>
+              <a:ea typeface="맑은 고딕"/>
+            </a:endParaRPr>
+          </a:p>
+          <a:p>
+            <a:pPr algn="l">
+              <a:lnSpc>
+                <a:spcPct val="104000"/>
+              </a:lnSpc>
+              <a:spcBef>
+                <a:spcPts val="0"/>
+              </a:spcBef>
+              <a:spcAft>
+                <a:spcPts val="500"/>
+              </a:spcAft>
+            </a:pPr>
+            <a:endParaRPr sz="1400" b="0" i="0" dirty="0">
+              <a:solidFill>
+                <a:srgbClr val="282D37"/>
+              </a:solidFill>
+              <a:latin typeface="맑은 고딕"/>
+              <a:ea typeface="맑은 고딕"/>
+            </a:endParaRPr>
+          </a:p>
+          <a:p>
+            <a:pPr algn="l">
+              <a:lnSpc>
+                <a:spcPct val="104000"/>
+              </a:lnSpc>
+              <a:spcBef>
+                <a:spcPts val="0"/>
+              </a:spcBef>
+              <a:spcAft>
+                <a:spcPts val="500"/>
+              </a:spcAft>
+            </a:pPr>
+            <a:r>
+              <a:rPr sz="1400" b="0" i="0" dirty="0">
+                <a:solidFill>
+                  <a:srgbClr val="282D37"/>
+                </a:solidFill>
+                <a:latin typeface="맑은 고딕"/>
+                <a:ea typeface="맑은 고딕"/>
+              </a:rPr>
+              <a:t>• </a:t>
+            </a:r>
+            <a:r>
+              <a:rPr sz="1400" b="0" i="0" dirty="0" err="1">
+                <a:solidFill>
+                  <a:srgbClr val="282D37"/>
+                </a:solidFill>
+                <a:latin typeface="맑은 고딕"/>
+                <a:ea typeface="맑은 고딕"/>
+              </a:rPr>
+              <a:t>카탈로그</a:t>
+            </a:r>
+            <a:r>
+              <a:rPr sz="1400" b="0" i="0" dirty="0">
+                <a:solidFill>
+                  <a:srgbClr val="282D37"/>
+                </a:solidFill>
+                <a:latin typeface="맑은 고딕"/>
+                <a:ea typeface="맑은 고딕"/>
+              </a:rPr>
+              <a:t> </a:t>
+            </a:r>
+            <a:r>
+              <a:rPr sz="1400" b="0" i="0" dirty="0" err="1">
+                <a:solidFill>
+                  <a:srgbClr val="282D37"/>
+                </a:solidFill>
+                <a:latin typeface="맑은 고딕"/>
+                <a:ea typeface="맑은 고딕"/>
+              </a:rPr>
+              <a:t>오분류</a:t>
+            </a:r>
+            <a:r>
+              <a:rPr sz="1400" b="0" i="0" dirty="0">
+                <a:solidFill>
+                  <a:srgbClr val="282D37"/>
+                </a:solidFill>
+                <a:latin typeface="맑은 고딕"/>
+                <a:ea typeface="맑은 고딕"/>
+              </a:rPr>
+              <a:t> </a:t>
+            </a:r>
+            <a:r>
+              <a:rPr sz="1400" b="0" i="0" dirty="0" err="1">
+                <a:solidFill>
+                  <a:srgbClr val="282D37"/>
+                </a:solidFill>
+                <a:latin typeface="맑은 고딕"/>
+                <a:ea typeface="맑은 고딕"/>
+              </a:rPr>
+              <a:t>후보</a:t>
+            </a:r>
+            <a:endParaRPr sz="1400" b="0" i="0" dirty="0">
+              <a:solidFill>
+                <a:srgbClr val="282D37"/>
+              </a:solidFill>
+              <a:latin typeface="맑은 고딕"/>
+              <a:ea typeface="맑은 고딕"/>
+            </a:endParaRPr>
           </a:p>
         </p:txBody>
       </p:sp>
